--- a/Indian Banking Transaction.pptx
+++ b/Indian Banking Transaction.pptx
@@ -9,8 +9,8 @@
     <p:sldId id="257" r:id="rId4"/>
     <p:sldId id="258" r:id="rId5"/>
     <p:sldId id="259" r:id="rId6"/>
-    <p:sldId id="260" r:id="rId7"/>
-    <p:sldId id="261" r:id="rId8"/>
+    <p:sldId id="261" r:id="rId7"/>
+    <p:sldId id="260" r:id="rId8"/>
     <p:sldId id="262" r:id="rId9"/>
     <p:sldId id="263" r:id="rId10"/>
     <p:sldId id="266" r:id="rId11"/>
@@ -5385,7 +5385,7 @@
                 <a:latin typeface="Times New Roman" panose="02020603050405020304" charset="0"/>
                 <a:cs typeface="Times New Roman" panose="02020603050405020304" charset="0"/>
               </a:rPr>
-              <a:t>Data Cleaning &amp; Preprocessing</a:t>
+              <a:t>Dataset Details</a:t>
             </a:r>
             <a:endParaRPr lang="en-US" altLang="en-US" sz="3200" b="1">
               <a:solidFill>
@@ -5412,171 +5412,177 @@
         </p:nvSpPr>
         <p:spPr/>
         <p:txBody>
-          <a:bodyPr/>
-          <a:p>
-            <a:r>
-              <a:rPr lang="en-US" altLang="en-US">
-                <a:solidFill>
-                  <a:schemeClr val="bg1"/>
-                </a:solidFill>
-                <a:latin typeface="Times New Roman" panose="02020603050405020304" charset="0"/>
-                <a:cs typeface="Times New Roman" panose="02020603050405020304" charset="0"/>
-              </a:rPr>
-              <a:t>Checked the dataset for missing values.</a:t>
-            </a:r>
-            <a:endParaRPr lang="en-US" altLang="en-US">
-              <a:solidFill>
-                <a:schemeClr val="bg1"/>
-              </a:solidFill>
-              <a:latin typeface="Times New Roman" panose="02020603050405020304" charset="0"/>
-              <a:cs typeface="Times New Roman" panose="02020603050405020304" charset="0"/>
-            </a:endParaRPr>
-          </a:p>
-          <a:p>
-            <a:r>
-              <a:rPr lang="en-US" altLang="en-US">
-                <a:solidFill>
-                  <a:schemeClr val="bg1"/>
-                </a:solidFill>
-                <a:latin typeface="Times New Roman" panose="02020603050405020304" charset="0"/>
-                <a:cs typeface="Times New Roman" panose="02020603050405020304" charset="0"/>
-              </a:rPr>
-              <a:t>Removed or handled duplicate records.</a:t>
-            </a:r>
-            <a:endParaRPr lang="en-US" altLang="en-US">
-              <a:solidFill>
-                <a:schemeClr val="bg1"/>
-              </a:solidFill>
-              <a:latin typeface="Times New Roman" panose="02020603050405020304" charset="0"/>
-              <a:cs typeface="Times New Roman" panose="02020603050405020304" charset="0"/>
-            </a:endParaRPr>
-          </a:p>
-          <a:p>
-            <a:r>
-              <a:rPr lang="en-US" altLang="en-US">
-                <a:solidFill>
-                  <a:schemeClr val="bg1"/>
-                </a:solidFill>
-                <a:latin typeface="Times New Roman" panose="02020603050405020304" charset="0"/>
-                <a:cs typeface="Times New Roman" panose="02020603050405020304" charset="0"/>
-              </a:rPr>
-              <a:t>Corrected data types for numerical, text and date/time columns.</a:t>
-            </a:r>
-            <a:endParaRPr lang="en-US" altLang="en-US">
-              <a:solidFill>
-                <a:schemeClr val="bg1"/>
-              </a:solidFill>
-              <a:latin typeface="Times New Roman" panose="02020603050405020304" charset="0"/>
-              <a:cs typeface="Times New Roman" panose="02020603050405020304" charset="0"/>
-            </a:endParaRPr>
-          </a:p>
-          <a:p>
-            <a:r>
-              <a:rPr lang="en-US" altLang="en-US">
-                <a:solidFill>
-                  <a:schemeClr val="bg1"/>
-                </a:solidFill>
-                <a:latin typeface="Times New Roman" panose="02020603050405020304" charset="0"/>
-                <a:cs typeface="Times New Roman" panose="02020603050405020304" charset="0"/>
-              </a:rPr>
-              <a:t>Standardized categorical values such as transaction type, bank and device type.</a:t>
-            </a:r>
-            <a:endParaRPr lang="en-US" altLang="en-US">
-              <a:solidFill>
-                <a:schemeClr val="bg1"/>
-              </a:solidFill>
-              <a:latin typeface="Times New Roman" panose="02020603050405020304" charset="0"/>
-              <a:cs typeface="Times New Roman" panose="02020603050405020304" charset="0"/>
-            </a:endParaRPr>
-          </a:p>
-          <a:p>
-            <a:r>
-              <a:rPr lang="en-US" altLang="en-US">
-                <a:solidFill>
-                  <a:schemeClr val="bg1"/>
-                </a:solidFill>
-                <a:latin typeface="Times New Roman" panose="02020603050405020304" charset="0"/>
-                <a:cs typeface="Times New Roman" panose="02020603050405020304" charset="0"/>
-              </a:rPr>
-              <a:t>Checked transaction amounts for invalid or inconsistent values.</a:t>
-            </a:r>
-            <a:endParaRPr lang="en-US" altLang="en-US">
-              <a:solidFill>
-                <a:schemeClr val="bg1"/>
-              </a:solidFill>
-              <a:latin typeface="Times New Roman" panose="02020603050405020304" charset="0"/>
-              <a:cs typeface="Times New Roman" panose="02020603050405020304" charset="0"/>
-            </a:endParaRPr>
-          </a:p>
-          <a:p>
-            <a:r>
-              <a:rPr lang="en-US" altLang="en-US">
-                <a:solidFill>
-                  <a:schemeClr val="bg1"/>
-                </a:solidFill>
-                <a:latin typeface="Times New Roman" panose="02020603050405020304" charset="0"/>
-                <a:cs typeface="Times New Roman" panose="02020603050405020304" charset="0"/>
-              </a:rPr>
-              <a:t>Extracted useful time information such as hour, day and weekend status.</a:t>
-            </a:r>
-            <a:endParaRPr lang="en-US" altLang="en-US">
-              <a:solidFill>
-                <a:schemeClr val="bg1"/>
-              </a:solidFill>
-              <a:latin typeface="Times New Roman" panose="02020603050405020304" charset="0"/>
-              <a:cs typeface="Times New Roman" panose="02020603050405020304" charset="0"/>
-            </a:endParaRPr>
-          </a:p>
-          <a:p>
-            <a:r>
-              <a:rPr lang="en-US" altLang="en-US">
-                <a:solidFill>
-                  <a:schemeClr val="bg1"/>
-                </a:solidFill>
-                <a:latin typeface="Times New Roman" panose="02020603050405020304" charset="0"/>
-                <a:cs typeface="Times New Roman" panose="02020603050405020304" charset="0"/>
-              </a:rPr>
-              <a:t>Verified the Fraud Flag values for fraud analysis.</a:t>
-            </a:r>
-            <a:endParaRPr lang="en-US" altLang="en-US">
-              <a:solidFill>
-                <a:schemeClr val="bg1"/>
-              </a:solidFill>
-              <a:latin typeface="Times New Roman" panose="02020603050405020304" charset="0"/>
-              <a:cs typeface="Times New Roman" panose="02020603050405020304" charset="0"/>
-            </a:endParaRPr>
-          </a:p>
-          <a:p>
-            <a:r>
-              <a:rPr lang="en-US" altLang="en-US">
-                <a:solidFill>
-                  <a:schemeClr val="bg1"/>
-                </a:solidFill>
-                <a:latin typeface="Times New Roman" panose="02020603050405020304" charset="0"/>
-                <a:cs typeface="Times New Roman" panose="02020603050405020304" charset="0"/>
-              </a:rPr>
-              <a:t>Renamed columns where necessary for easier understanding.</a:t>
-            </a:r>
-            <a:endParaRPr lang="en-US" altLang="en-US">
-              <a:solidFill>
-                <a:schemeClr val="bg1"/>
-              </a:solidFill>
-              <a:latin typeface="Times New Roman" panose="02020603050405020304" charset="0"/>
-              <a:cs typeface="Times New Roman" panose="02020603050405020304" charset="0"/>
-            </a:endParaRPr>
-          </a:p>
-          <a:p>
-            <a:r>
-              <a:rPr lang="en-US" altLang="en-US">
-                <a:solidFill>
-                  <a:schemeClr val="bg1"/>
-                </a:solidFill>
-                <a:latin typeface="Times New Roman" panose="02020603050405020304" charset="0"/>
-                <a:cs typeface="Times New Roman" panose="02020603050405020304" charset="0"/>
-              </a:rPr>
-              <a:t>Loaded the cleaned dataset into Power BI for visualization.</a:t>
-            </a:r>
-            <a:endParaRPr lang="en-US" altLang="en-US">
+          <a:bodyPr>
+            <a:normAutofit lnSpcReduction="20000"/>
+          </a:bodyPr>
+          <a:p>
+            <a:pPr marL="0" indent="0">
+              <a:buNone/>
+            </a:pPr>
+            <a:r>
+              <a:rPr lang="en-US" altLang="en-US" b="1">
+                <a:solidFill>
+                  <a:schemeClr val="bg1"/>
+                </a:solidFill>
+                <a:latin typeface="Times New Roman" panose="02020603050405020304" charset="0"/>
+                <a:cs typeface="Times New Roman" panose="02020603050405020304" charset="0"/>
+              </a:rPr>
+              <a:t>Dataset Name</a:t>
+            </a:r>
+            <a:endParaRPr lang="en-US" altLang="en-US" b="1"/>
+          </a:p>
+          <a:p>
+            <a:pPr lvl="1"/>
+            <a:r>
+              <a:rPr lang="en-US" altLang="en-US" sz="1800">
+                <a:solidFill>
+                  <a:schemeClr val="bg1"/>
+                </a:solidFill>
+                <a:latin typeface="Times New Roman" panose="02020603050405020304" charset="0"/>
+                <a:cs typeface="Times New Roman" panose="02020603050405020304" charset="0"/>
+              </a:rPr>
+              <a:t>Indian Banking Transactions</a:t>
+            </a:r>
+            <a:endParaRPr lang="en-US" altLang="en-US" b="1">
+              <a:latin typeface="Times New Roman" panose="02020603050405020304" charset="0"/>
+              <a:cs typeface="Times New Roman" panose="02020603050405020304" charset="0"/>
+            </a:endParaRPr>
+          </a:p>
+          <a:p>
+            <a:pPr marL="0" indent="0">
+              <a:buNone/>
+            </a:pPr>
+            <a:r>
+              <a:rPr lang="en-US" altLang="en-US" b="1">
+                <a:solidFill>
+                  <a:schemeClr val="bg1"/>
+                </a:solidFill>
+                <a:latin typeface="Times New Roman" panose="02020603050405020304" charset="0"/>
+                <a:cs typeface="Times New Roman" panose="02020603050405020304" charset="0"/>
+              </a:rPr>
+              <a:t>Dataset Overview</a:t>
+            </a:r>
+            <a:endParaRPr lang="en-US" altLang="en-US" b="1">
+              <a:solidFill>
+                <a:schemeClr val="bg1"/>
+              </a:solidFill>
+              <a:latin typeface="Times New Roman" panose="02020603050405020304" charset="0"/>
+              <a:cs typeface="Times New Roman" panose="02020603050405020304" charset="0"/>
+            </a:endParaRPr>
+          </a:p>
+          <a:p>
+            <a:pPr lvl="1"/>
+            <a:r>
+              <a:rPr lang="en-US" altLang="en-US" sz="1800">
+                <a:solidFill>
+                  <a:schemeClr val="bg1"/>
+                </a:solidFill>
+                <a:latin typeface="Times New Roman" panose="02020603050405020304" charset="0"/>
+                <a:cs typeface="Times New Roman" panose="02020603050405020304" charset="0"/>
+              </a:rPr>
+              <a:t>Total Records: 5,50,000 transactions</a:t>
+            </a:r>
+            <a:endParaRPr lang="en-US" altLang="en-US" sz="1800">
+              <a:solidFill>
+                <a:schemeClr val="bg1"/>
+              </a:solidFill>
+              <a:latin typeface="Times New Roman" panose="02020603050405020304" charset="0"/>
+              <a:cs typeface="Times New Roman" panose="02020603050405020304" charset="0"/>
+            </a:endParaRPr>
+          </a:p>
+          <a:p>
+            <a:pPr lvl="1"/>
+            <a:r>
+              <a:rPr lang="en-US" altLang="en-US" sz="1800">
+                <a:solidFill>
+                  <a:schemeClr val="bg1"/>
+                </a:solidFill>
+                <a:latin typeface="Times New Roman" panose="02020603050405020304" charset="0"/>
+                <a:cs typeface="Times New Roman" panose="02020603050405020304" charset="0"/>
+              </a:rPr>
+              <a:t>Data Type: Structured transactional data</a:t>
+            </a:r>
+            <a:endParaRPr lang="en-US" altLang="en-US" sz="1800">
+              <a:solidFill>
+                <a:schemeClr val="bg1"/>
+              </a:solidFill>
+              <a:latin typeface="Times New Roman" panose="02020603050405020304" charset="0"/>
+              <a:cs typeface="Times New Roman" panose="02020603050405020304" charset="0"/>
+            </a:endParaRPr>
+          </a:p>
+          <a:p>
+            <a:pPr lvl="1"/>
+            <a:r>
+              <a:rPr lang="en-US" altLang="en-US" sz="1800">
+                <a:solidFill>
+                  <a:schemeClr val="bg1"/>
+                </a:solidFill>
+                <a:latin typeface="Times New Roman" panose="02020603050405020304" charset="0"/>
+                <a:cs typeface="Times New Roman" panose="02020603050405020304" charset="0"/>
+              </a:rPr>
+              <a:t>Domain: Banking &amp; Digital Transactions</a:t>
+            </a:r>
+            <a:endParaRPr lang="en-US" altLang="en-US" sz="1800">
+              <a:solidFill>
+                <a:schemeClr val="bg1"/>
+              </a:solidFill>
+              <a:latin typeface="Times New Roman" panose="02020603050405020304" charset="0"/>
+              <a:cs typeface="Times New Roman" panose="02020603050405020304" charset="0"/>
+            </a:endParaRPr>
+          </a:p>
+          <a:p>
+            <a:pPr lvl="1"/>
+            <a:r>
+              <a:rPr lang="en-US" altLang="en-US" sz="1800">
+                <a:solidFill>
+                  <a:schemeClr val="bg1"/>
+                </a:solidFill>
+                <a:latin typeface="Times New Roman" panose="02020603050405020304" charset="0"/>
+                <a:cs typeface="Times New Roman" panose="02020603050405020304" charset="0"/>
+              </a:rPr>
+              <a:t>Source: Kaggle</a:t>
+            </a:r>
+            <a:endParaRPr lang="en-US" altLang="en-US" sz="1800">
+              <a:solidFill>
+                <a:schemeClr val="bg1"/>
+              </a:solidFill>
+              <a:latin typeface="Times New Roman" panose="02020603050405020304" charset="0"/>
+              <a:cs typeface="Times New Roman" panose="02020603050405020304" charset="0"/>
+            </a:endParaRPr>
+          </a:p>
+          <a:p>
+            <a:pPr lvl="1"/>
+            <a:r>
+              <a:rPr lang="en-US" altLang="en-US" sz="1800">
+                <a:solidFill>
+                  <a:schemeClr val="bg1"/>
+                </a:solidFill>
+                <a:latin typeface="Times New Roman" panose="02020603050405020304" charset="0"/>
+                <a:cs typeface="Times New Roman" panose="02020603050405020304" charset="0"/>
+              </a:rPr>
+              <a:t>Format: Tabular dataset</a:t>
+            </a:r>
+            <a:endParaRPr lang="en-US" altLang="en-US" sz="1800">
+              <a:solidFill>
+                <a:schemeClr val="bg1"/>
+              </a:solidFill>
+              <a:latin typeface="Times New Roman" panose="02020603050405020304" charset="0"/>
+              <a:cs typeface="Times New Roman" panose="02020603050405020304" charset="0"/>
+            </a:endParaRPr>
+          </a:p>
+          <a:p>
+            <a:pPr lvl="1"/>
+            <a:r>
+              <a:rPr lang="en-US" altLang="en-US" sz="1800">
+                <a:solidFill>
+                  <a:schemeClr val="bg1"/>
+                </a:solidFill>
+                <a:latin typeface="Times New Roman" panose="02020603050405020304" charset="0"/>
+                <a:cs typeface="Times New Roman" panose="02020603050405020304" charset="0"/>
+              </a:rPr>
+              <a:t>Purpose: To analyze transaction behavior, banking activity and fraudulent transactions.</a:t>
+            </a:r>
+            <a:endParaRPr lang="en-US" altLang="en-US" sz="1800">
               <a:solidFill>
                 <a:schemeClr val="bg1"/>
               </a:solidFill>
@@ -5633,7 +5639,7 @@
                 <a:latin typeface="Times New Roman" panose="02020603050405020304" charset="0"/>
                 <a:cs typeface="Times New Roman" panose="02020603050405020304" charset="0"/>
               </a:rPr>
-              <a:t>Dataset Details</a:t>
+              <a:t>Data Cleaning &amp; Preprocessing</a:t>
             </a:r>
             <a:endParaRPr lang="en-US" altLang="en-US" sz="3200" b="1">
               <a:solidFill>
@@ -5660,177 +5666,171 @@
         </p:nvSpPr>
         <p:spPr/>
         <p:txBody>
-          <a:bodyPr>
-            <a:normAutofit lnSpcReduction="20000"/>
-          </a:bodyPr>
-          <a:p>
-            <a:pPr marL="0" indent="0">
-              <a:buNone/>
-            </a:pPr>
-            <a:r>
-              <a:rPr lang="en-US" altLang="en-US" b="1">
-                <a:solidFill>
-                  <a:schemeClr val="bg1"/>
-                </a:solidFill>
-                <a:latin typeface="Times New Roman" panose="02020603050405020304" charset="0"/>
-                <a:cs typeface="Times New Roman" panose="02020603050405020304" charset="0"/>
-              </a:rPr>
-              <a:t>Dataset Name</a:t>
-            </a:r>
-            <a:endParaRPr lang="en-US" altLang="en-US" b="1"/>
-          </a:p>
-          <a:p>
-            <a:pPr lvl="1"/>
-            <a:r>
-              <a:rPr lang="en-US" altLang="en-US" sz="1800">
-                <a:solidFill>
-                  <a:schemeClr val="bg1"/>
-                </a:solidFill>
-                <a:latin typeface="Times New Roman" panose="02020603050405020304" charset="0"/>
-                <a:cs typeface="Times New Roman" panose="02020603050405020304" charset="0"/>
-              </a:rPr>
-              <a:t>Indian Banking Transactions</a:t>
-            </a:r>
-            <a:endParaRPr lang="en-US" altLang="en-US" b="1">
-              <a:latin typeface="Times New Roman" panose="02020603050405020304" charset="0"/>
-              <a:cs typeface="Times New Roman" panose="02020603050405020304" charset="0"/>
-            </a:endParaRPr>
-          </a:p>
-          <a:p>
-            <a:pPr marL="0" indent="0">
-              <a:buNone/>
-            </a:pPr>
-            <a:r>
-              <a:rPr lang="en-US" altLang="en-US" b="1">
-                <a:solidFill>
-                  <a:schemeClr val="bg1"/>
-                </a:solidFill>
-                <a:latin typeface="Times New Roman" panose="02020603050405020304" charset="0"/>
-                <a:cs typeface="Times New Roman" panose="02020603050405020304" charset="0"/>
-              </a:rPr>
-              <a:t>Dataset Overview</a:t>
-            </a:r>
-            <a:endParaRPr lang="en-US" altLang="en-US" b="1">
-              <a:solidFill>
-                <a:schemeClr val="bg1"/>
-              </a:solidFill>
-              <a:latin typeface="Times New Roman" panose="02020603050405020304" charset="0"/>
-              <a:cs typeface="Times New Roman" panose="02020603050405020304" charset="0"/>
-            </a:endParaRPr>
-          </a:p>
-          <a:p>
-            <a:pPr lvl="1"/>
-            <a:r>
-              <a:rPr lang="en-US" altLang="en-US" sz="1800">
-                <a:solidFill>
-                  <a:schemeClr val="bg1"/>
-                </a:solidFill>
-                <a:latin typeface="Times New Roman" panose="02020603050405020304" charset="0"/>
-                <a:cs typeface="Times New Roman" panose="02020603050405020304" charset="0"/>
-              </a:rPr>
-              <a:t>Total Records: 5,50,000 transactions</a:t>
-            </a:r>
-            <a:endParaRPr lang="en-US" altLang="en-US" sz="1800">
-              <a:solidFill>
-                <a:schemeClr val="bg1"/>
-              </a:solidFill>
-              <a:latin typeface="Times New Roman" panose="02020603050405020304" charset="0"/>
-              <a:cs typeface="Times New Roman" panose="02020603050405020304" charset="0"/>
-            </a:endParaRPr>
-          </a:p>
-          <a:p>
-            <a:pPr lvl="1"/>
-            <a:r>
-              <a:rPr lang="en-US" altLang="en-US" sz="1800">
-                <a:solidFill>
-                  <a:schemeClr val="bg1"/>
-                </a:solidFill>
-                <a:latin typeface="Times New Roman" panose="02020603050405020304" charset="0"/>
-                <a:cs typeface="Times New Roman" panose="02020603050405020304" charset="0"/>
-              </a:rPr>
-              <a:t>Data Type: Structured transactional data</a:t>
-            </a:r>
-            <a:endParaRPr lang="en-US" altLang="en-US" sz="1800">
-              <a:solidFill>
-                <a:schemeClr val="bg1"/>
-              </a:solidFill>
-              <a:latin typeface="Times New Roman" panose="02020603050405020304" charset="0"/>
-              <a:cs typeface="Times New Roman" panose="02020603050405020304" charset="0"/>
-            </a:endParaRPr>
-          </a:p>
-          <a:p>
-            <a:pPr lvl="1"/>
-            <a:r>
-              <a:rPr lang="en-US" altLang="en-US" sz="1800">
-                <a:solidFill>
-                  <a:schemeClr val="bg1"/>
-                </a:solidFill>
-                <a:latin typeface="Times New Roman" panose="02020603050405020304" charset="0"/>
-                <a:cs typeface="Times New Roman" panose="02020603050405020304" charset="0"/>
-              </a:rPr>
-              <a:t>Domain: Banking &amp; Digital Transactions</a:t>
-            </a:r>
-            <a:endParaRPr lang="en-US" altLang="en-US" sz="1800">
-              <a:solidFill>
-                <a:schemeClr val="bg1"/>
-              </a:solidFill>
-              <a:latin typeface="Times New Roman" panose="02020603050405020304" charset="0"/>
-              <a:cs typeface="Times New Roman" panose="02020603050405020304" charset="0"/>
-            </a:endParaRPr>
-          </a:p>
-          <a:p>
-            <a:pPr lvl="1"/>
-            <a:r>
-              <a:rPr lang="en-US" altLang="en-US" sz="1800">
-                <a:solidFill>
-                  <a:schemeClr val="bg1"/>
-                </a:solidFill>
-                <a:latin typeface="Times New Roman" panose="02020603050405020304" charset="0"/>
-                <a:cs typeface="Times New Roman" panose="02020603050405020304" charset="0"/>
-              </a:rPr>
-              <a:t>Source: Kaggle</a:t>
-            </a:r>
-            <a:endParaRPr lang="en-US" altLang="en-US" sz="1800">
-              <a:solidFill>
-                <a:schemeClr val="bg1"/>
-              </a:solidFill>
-              <a:latin typeface="Times New Roman" panose="02020603050405020304" charset="0"/>
-              <a:cs typeface="Times New Roman" panose="02020603050405020304" charset="0"/>
-            </a:endParaRPr>
-          </a:p>
-          <a:p>
-            <a:pPr lvl="1"/>
-            <a:r>
-              <a:rPr lang="en-US" altLang="en-US" sz="1800">
-                <a:solidFill>
-                  <a:schemeClr val="bg1"/>
-                </a:solidFill>
-                <a:latin typeface="Times New Roman" panose="02020603050405020304" charset="0"/>
-                <a:cs typeface="Times New Roman" panose="02020603050405020304" charset="0"/>
-              </a:rPr>
-              <a:t>Format: Tabular dataset</a:t>
-            </a:r>
-            <a:endParaRPr lang="en-US" altLang="en-US" sz="1800">
-              <a:solidFill>
-                <a:schemeClr val="bg1"/>
-              </a:solidFill>
-              <a:latin typeface="Times New Roman" panose="02020603050405020304" charset="0"/>
-              <a:cs typeface="Times New Roman" panose="02020603050405020304" charset="0"/>
-            </a:endParaRPr>
-          </a:p>
-          <a:p>
-            <a:pPr lvl="1"/>
-            <a:r>
-              <a:rPr lang="en-US" altLang="en-US" sz="1800">
-                <a:solidFill>
-                  <a:schemeClr val="bg1"/>
-                </a:solidFill>
-                <a:latin typeface="Times New Roman" panose="02020603050405020304" charset="0"/>
-                <a:cs typeface="Times New Roman" panose="02020603050405020304" charset="0"/>
-              </a:rPr>
-              <a:t>Purpose: To analyze transaction behavior, banking activity and fraudulent transactions.</a:t>
-            </a:r>
-            <a:endParaRPr lang="en-US" altLang="en-US" sz="1800">
+          <a:bodyPr/>
+          <a:p>
+            <a:r>
+              <a:rPr lang="en-US" altLang="en-US">
+                <a:solidFill>
+                  <a:schemeClr val="bg1"/>
+                </a:solidFill>
+                <a:latin typeface="Times New Roman" panose="02020603050405020304" charset="0"/>
+                <a:cs typeface="Times New Roman" panose="02020603050405020304" charset="0"/>
+              </a:rPr>
+              <a:t>Checked the dataset for missing values.</a:t>
+            </a:r>
+            <a:endParaRPr lang="en-US" altLang="en-US">
+              <a:solidFill>
+                <a:schemeClr val="bg1"/>
+              </a:solidFill>
+              <a:latin typeface="Times New Roman" panose="02020603050405020304" charset="0"/>
+              <a:cs typeface="Times New Roman" panose="02020603050405020304" charset="0"/>
+            </a:endParaRPr>
+          </a:p>
+          <a:p>
+            <a:r>
+              <a:rPr lang="en-US" altLang="en-US">
+                <a:solidFill>
+                  <a:schemeClr val="bg1"/>
+                </a:solidFill>
+                <a:latin typeface="Times New Roman" panose="02020603050405020304" charset="0"/>
+                <a:cs typeface="Times New Roman" panose="02020603050405020304" charset="0"/>
+              </a:rPr>
+              <a:t>Removed or handled duplicate records.</a:t>
+            </a:r>
+            <a:endParaRPr lang="en-US" altLang="en-US">
+              <a:solidFill>
+                <a:schemeClr val="bg1"/>
+              </a:solidFill>
+              <a:latin typeface="Times New Roman" panose="02020603050405020304" charset="0"/>
+              <a:cs typeface="Times New Roman" panose="02020603050405020304" charset="0"/>
+            </a:endParaRPr>
+          </a:p>
+          <a:p>
+            <a:r>
+              <a:rPr lang="en-US" altLang="en-US">
+                <a:solidFill>
+                  <a:schemeClr val="bg1"/>
+                </a:solidFill>
+                <a:latin typeface="Times New Roman" panose="02020603050405020304" charset="0"/>
+                <a:cs typeface="Times New Roman" panose="02020603050405020304" charset="0"/>
+              </a:rPr>
+              <a:t>Corrected data types for numerical, text and date/time columns.</a:t>
+            </a:r>
+            <a:endParaRPr lang="en-US" altLang="en-US">
+              <a:solidFill>
+                <a:schemeClr val="bg1"/>
+              </a:solidFill>
+              <a:latin typeface="Times New Roman" panose="02020603050405020304" charset="0"/>
+              <a:cs typeface="Times New Roman" panose="02020603050405020304" charset="0"/>
+            </a:endParaRPr>
+          </a:p>
+          <a:p>
+            <a:r>
+              <a:rPr lang="en-US" altLang="en-US">
+                <a:solidFill>
+                  <a:schemeClr val="bg1"/>
+                </a:solidFill>
+                <a:latin typeface="Times New Roman" panose="02020603050405020304" charset="0"/>
+                <a:cs typeface="Times New Roman" panose="02020603050405020304" charset="0"/>
+              </a:rPr>
+              <a:t>Standardized categorical values such as transaction type, bank and device type.</a:t>
+            </a:r>
+            <a:endParaRPr lang="en-US" altLang="en-US">
+              <a:solidFill>
+                <a:schemeClr val="bg1"/>
+              </a:solidFill>
+              <a:latin typeface="Times New Roman" panose="02020603050405020304" charset="0"/>
+              <a:cs typeface="Times New Roman" panose="02020603050405020304" charset="0"/>
+            </a:endParaRPr>
+          </a:p>
+          <a:p>
+            <a:r>
+              <a:rPr lang="en-US" altLang="en-US">
+                <a:solidFill>
+                  <a:schemeClr val="bg1"/>
+                </a:solidFill>
+                <a:latin typeface="Times New Roman" panose="02020603050405020304" charset="0"/>
+                <a:cs typeface="Times New Roman" panose="02020603050405020304" charset="0"/>
+              </a:rPr>
+              <a:t>Checked transaction amounts for invalid or inconsistent values.</a:t>
+            </a:r>
+            <a:endParaRPr lang="en-US" altLang="en-US">
+              <a:solidFill>
+                <a:schemeClr val="bg1"/>
+              </a:solidFill>
+              <a:latin typeface="Times New Roman" panose="02020603050405020304" charset="0"/>
+              <a:cs typeface="Times New Roman" panose="02020603050405020304" charset="0"/>
+            </a:endParaRPr>
+          </a:p>
+          <a:p>
+            <a:r>
+              <a:rPr lang="en-US" altLang="en-US">
+                <a:solidFill>
+                  <a:schemeClr val="bg1"/>
+                </a:solidFill>
+                <a:latin typeface="Times New Roman" panose="02020603050405020304" charset="0"/>
+                <a:cs typeface="Times New Roman" panose="02020603050405020304" charset="0"/>
+              </a:rPr>
+              <a:t>Extracted useful time information such as hour, day and weekend status.</a:t>
+            </a:r>
+            <a:endParaRPr lang="en-US" altLang="en-US">
+              <a:solidFill>
+                <a:schemeClr val="bg1"/>
+              </a:solidFill>
+              <a:latin typeface="Times New Roman" panose="02020603050405020304" charset="0"/>
+              <a:cs typeface="Times New Roman" panose="02020603050405020304" charset="0"/>
+            </a:endParaRPr>
+          </a:p>
+          <a:p>
+            <a:r>
+              <a:rPr lang="en-US" altLang="en-US">
+                <a:solidFill>
+                  <a:schemeClr val="bg1"/>
+                </a:solidFill>
+                <a:latin typeface="Times New Roman" panose="02020603050405020304" charset="0"/>
+                <a:cs typeface="Times New Roman" panose="02020603050405020304" charset="0"/>
+              </a:rPr>
+              <a:t>Verified the Fraud Flag values for fraud analysis.</a:t>
+            </a:r>
+            <a:endParaRPr lang="en-US" altLang="en-US">
+              <a:solidFill>
+                <a:schemeClr val="bg1"/>
+              </a:solidFill>
+              <a:latin typeface="Times New Roman" panose="02020603050405020304" charset="0"/>
+              <a:cs typeface="Times New Roman" panose="02020603050405020304" charset="0"/>
+            </a:endParaRPr>
+          </a:p>
+          <a:p>
+            <a:r>
+              <a:rPr lang="en-US" altLang="en-US">
+                <a:solidFill>
+                  <a:schemeClr val="bg1"/>
+                </a:solidFill>
+                <a:latin typeface="Times New Roman" panose="02020603050405020304" charset="0"/>
+                <a:cs typeface="Times New Roman" panose="02020603050405020304" charset="0"/>
+              </a:rPr>
+              <a:t>Renamed columns where necessary for easier understanding.</a:t>
+            </a:r>
+            <a:endParaRPr lang="en-US" altLang="en-US">
+              <a:solidFill>
+                <a:schemeClr val="bg1"/>
+              </a:solidFill>
+              <a:latin typeface="Times New Roman" panose="02020603050405020304" charset="0"/>
+              <a:cs typeface="Times New Roman" panose="02020603050405020304" charset="0"/>
+            </a:endParaRPr>
+          </a:p>
+          <a:p>
+            <a:r>
+              <a:rPr lang="en-US" altLang="en-US">
+                <a:solidFill>
+                  <a:schemeClr val="bg1"/>
+                </a:solidFill>
+                <a:latin typeface="Times New Roman" panose="02020603050405020304" charset="0"/>
+                <a:cs typeface="Times New Roman" panose="02020603050405020304" charset="0"/>
+              </a:rPr>
+              <a:t>Loaded the cleaned dataset into Power BI for visualization.</a:t>
+            </a:r>
+            <a:endParaRPr lang="en-US" altLang="en-US">
               <a:solidFill>
                 <a:schemeClr val="bg1"/>
               </a:solidFill>
